--- a/skills/beautiful-slides/charts/bar/example-playful-marketing.pptx
+++ b/skills/beautiful-slides/charts/bar/example-playful-marketing.pptx
@@ -3348,7 +3348,7 @@
             <a:r>
               <a:rPr sz="1400" b="0">
                 <a:solidFill>
-                  <a:srgbClr val="6E6A73"/>
+                  <a:srgbClr val="1B1B1F"/>
                 </a:solidFill>
                 <a:latin typeface="Recursive Mono"/>
               </a:rPr>
@@ -3383,7 +3383,7 @@
             <a:r>
               <a:rPr sz="1400" b="0">
                 <a:solidFill>
-                  <a:srgbClr val="6E6A73"/>
+                  <a:srgbClr val="1B1B1F"/>
                 </a:solidFill>
                 <a:latin typeface="Recursive Mono"/>
               </a:rPr>
@@ -3453,7 +3453,7 @@
             <a:r>
               <a:rPr sz="1400" b="0">
                 <a:solidFill>
-                  <a:srgbClr val="6E6A73"/>
+                  <a:srgbClr val="1B1B1F"/>
                 </a:solidFill>
                 <a:latin typeface="Recursive Mono"/>
               </a:rPr>
@@ -3523,7 +3523,7 @@
             <a:r>
               <a:rPr sz="1400" b="0">
                 <a:solidFill>
-                  <a:srgbClr val="6E6A73"/>
+                  <a:srgbClr val="1B1B1F"/>
                 </a:solidFill>
                 <a:latin typeface="Recursive Mono"/>
               </a:rPr>
@@ -3593,7 +3593,7 @@
             <a:r>
               <a:rPr sz="1400" b="0">
                 <a:solidFill>
-                  <a:srgbClr val="6E6A73"/>
+                  <a:srgbClr val="1B1B1F"/>
                 </a:solidFill>
                 <a:latin typeface="Recursive Mono"/>
               </a:rPr>
@@ -3663,7 +3663,7 @@
             <a:r>
               <a:rPr sz="1400" b="0">
                 <a:solidFill>
-                  <a:srgbClr val="6E6A73"/>
+                  <a:srgbClr val="1B1B1F"/>
                 </a:solidFill>
                 <a:latin typeface="Recursive Mono"/>
               </a:rPr>
@@ -3733,7 +3733,7 @@
             <a:r>
               <a:rPr sz="1400" b="0">
                 <a:solidFill>
-                  <a:srgbClr val="6E6A73"/>
+                  <a:srgbClr val="1B1B1F"/>
                 </a:solidFill>
                 <a:latin typeface="Recursive Mono"/>
               </a:rPr>
@@ -3803,7 +3803,7 @@
             <a:r>
               <a:rPr sz="1400" b="0">
                 <a:solidFill>
-                  <a:srgbClr val="6E6A73"/>
+                  <a:srgbClr val="1B1B1F"/>
                 </a:solidFill>
                 <a:latin typeface="Recursive Mono"/>
               </a:rPr>
